--- a/dist/초2/체육·보건·안전/건강과감정/초2_체육·보건·안전_건강과감정_01_식사·수면·위생습관.pptx
+++ b/dist/초2/체육·보건·안전/건강과감정/초2_체육·보건·안전_건강과감정_01_식사·수면·위생습관.pptx
@@ -120,13 +120,13 @@
   <p:extLst>
     <p:ext uri="{521415D9-36F7-43E2-AB2F-B90AF26B5E84}">
       <p14:sectionLst xmlns:p14="http://schemas.microsoft.com/office/powerpoint/2010/main">
-        <p14:section name="도입" id="{33d6cc2f-f5f9-f275-086f-3d5a016d1988}">
+        <p14:section name="도입" id="{69a15aba-dafd-7dcc-2a34-3b29feae5ee7}">
           <p14:sldIdLst>
             <p14:sldId id="256"/>
             <p14:sldId id="257"/>
           </p14:sldIdLst>
         </p14:section>
-        <p14:section name="개념" id="{91147ac4-66f7-fea3-3fe4-847d6fb32f07}">
+        <p14:section name="개념" id="{85cc16f0-4f31-86d7-d11d-9fdf5cf41682}">
           <p14:sldIdLst>
             <p14:sldId id="258"/>
             <p14:sldId id="259"/>
@@ -134,7 +134,7 @@
             <p14:sldId id="263"/>
           </p14:sldIdLst>
         </p14:section>
-        <p14:section name="연습" id="{0d7fb6f2-f033-be6e-b1ef-93ff88cda762}">
+        <p14:section name="연습" id="{91159f26-cb2a-b41a-36b4-17fcb8ce1836}">
           <p14:sldIdLst>
             <p14:sldId id="260"/>
             <p14:sldId id="261"/>
@@ -142,24 +142,24 @@
             <p14:sldId id="265"/>
           </p14:sldIdLst>
         </p14:section>
-        <p14:section name="개념" id="{3e361406-f33c-9d7c-5ed4-215c8013a6ff}">
+        <p14:section name="개념" id="{d885753d-ec24-1026-908a-b5d16060c5c9}">
           <p14:sldIdLst/>
         </p14:section>
-        <p14:section name="연습" id="{53fbf15d-2d2a-3524-d514-54837998f7f0}">
+        <p14:section name="연습" id="{52e5394d-1273-5cb7-1e5d-7ea828be55ab}">
           <p14:sldIdLst/>
         </p14:section>
-        <p14:section name="확인" id="{a716c10c-0d39-9aaa-ecbc-64d354632342}">
+        <p14:section name="확인" id="{9fae8bc2-5472-196f-4029-bf3a3295b8da}">
           <p14:sldIdLst>
             <p14:sldId id="266"/>
             <p14:sldId id="267"/>
           </p14:sldIdLst>
         </p14:section>
-        <p14:section name="정리" id="{3903b35b-78f1-28fe-136d-bc538086cda2}">
+        <p14:section name="정리" id="{275fa8c6-d1bb-1d6b-1a76-30ef88a5da58}">
           <p14:sldIdLst>
             <p14:sldId id="268"/>
           </p14:sldIdLst>
         </p14:section>
-        <p14:section name="보충" id="{503e7b78-28a6-f8aa-4573-0903271ac25e}">
+        <p14:section name="보충" id="{a4496690-3cbb-5d8c-5ea7-a1506923ad8a}">
           <p14:sldIdLst>
             <p14:sldId id="269"/>
           </p14:sldIdLst>
